--- a/DOCUMENT/ПРЕЗЕНТАЦИЯ.pptx
+++ b/DOCUMENT/ПРЕЗЕНТАЦИЯ.pptx
@@ -1184,7 +1184,7 @@
           </a:prstGeom>
           <a:extLst>
             <a:ext uri="{C572A759-6A51-4108-AA02-DFA0A04FC94B}">
-              <ma14:wrappingTextBoxFlag xmlns:ma14="http://schemas.microsoft.com/office/mac/drawingml/2011/main" xmlns="" val="0"/>
+              <ma14:wrappingTextBoxFlag xmlns="" xmlns:ma14="http://schemas.microsoft.com/office/mac/drawingml/2011/main" val="0"/>
             </a:ext>
           </a:extLst>
         </p:spPr>
@@ -1262,7 +1262,7 @@
           </a:prstGeom>
           <a:extLst>
             <a:ext uri="{C572A759-6A51-4108-AA02-DFA0A04FC94B}">
-              <ma14:wrappingTextBoxFlag xmlns:ma14="http://schemas.microsoft.com/office/mac/drawingml/2011/main" xmlns="" val="0"/>
+              <ma14:wrappingTextBoxFlag xmlns="" xmlns:ma14="http://schemas.microsoft.com/office/mac/drawingml/2011/main" val="0"/>
             </a:ext>
           </a:extLst>
         </p:spPr>
@@ -1794,7 +1794,7 @@
         <p:spPr>
           <a:xfrm>
             <a:off x="731520" y="3401568"/>
-            <a:ext cx="3200400" cy="256032"/>
+            <a:ext cx="3200400" cy="932688"/>
           </a:xfrm>
           <a:prstGeom prst="rect">
             <a:avLst/>
@@ -1810,14 +1810,40 @@
               <a:buNone/>
             </a:pPr>
             <a:r>
-              <a:rPr lang="en-US" sz="1200" dirty="0">
+              <a:rPr lang="ru-RU" sz="1400" dirty="0">
                 <a:solidFill>
                   <a:srgbClr val="C6D6E8"/>
                 </a:solidFill>
               </a:rPr>
-              <a:t>Производственная практика</a:t>
-            </a:r>
-            <a:endParaRPr lang="en-US" sz="1200" dirty="0"/>
+              <a:t>Выполнил: Баранцев Евгений Дмитриевич</a:t>
+            </a:r>
+          </a:p>
+          <a:p>
+            <a:pPr marL="0" indent="0">
+              <a:buNone/>
+            </a:pPr>
+            <a:r>
+              <a:rPr lang="ru-RU" sz="1400" dirty="0">
+                <a:solidFill>
+                  <a:srgbClr val="C6D6E8"/>
+                </a:solidFill>
+              </a:rPr>
+              <a:t>Руководитель практики: Махнев Александр Анатольевич</a:t>
+            </a:r>
+          </a:p>
+          <a:p>
+            <a:pPr marL="0" indent="0">
+              <a:buNone/>
+            </a:pPr>
+            <a:r>
+              <a:rPr lang="ru-RU" sz="1400" dirty="0">
+                <a:solidFill>
+                  <a:srgbClr val="C6D6E8"/>
+                </a:solidFill>
+              </a:rPr>
+              <a:t>Группа: 23П-2</a:t>
+            </a:r>
+            <a:endParaRPr lang="en-US" sz="1400" dirty="0"/>
           </a:p>
         </p:txBody>
       </p:sp>
@@ -1877,7 +1903,7 @@
           </a:prstGeom>
           <a:extLst>
             <a:ext uri="{C572A759-6A51-4108-AA02-DFA0A04FC94B}">
-              <ma14:wrappingTextBoxFlag xmlns:ma14="http://schemas.microsoft.com/office/mac/drawingml/2011/main" xmlns="" val="0"/>
+              <ma14:wrappingTextBoxFlag xmlns="" xmlns:ma14="http://schemas.microsoft.com/office/mac/drawingml/2011/main" val="0"/>
             </a:ext>
           </a:extLst>
         </p:spPr>
@@ -2644,7 +2670,7 @@
           </a:prstGeom>
           <a:extLst>
             <a:ext uri="{C572A759-6A51-4108-AA02-DFA0A04FC94B}">
-              <ma14:wrappingTextBoxFlag xmlns:ma14="http://schemas.microsoft.com/office/mac/drawingml/2011/main" xmlns="" val="0"/>
+              <ma14:wrappingTextBoxFlag xmlns="" xmlns:ma14="http://schemas.microsoft.com/office/mac/drawingml/2011/main" val="0"/>
             </a:ext>
           </a:extLst>
         </p:spPr>
@@ -3937,7 +3963,7 @@
           </a:prstGeom>
           <a:extLst>
             <a:ext uri="{C572A759-6A51-4108-AA02-DFA0A04FC94B}">
-              <ma14:wrappingTextBoxFlag xmlns:ma14="http://schemas.microsoft.com/office/mac/drawingml/2011/main" xmlns="" val="0"/>
+              <ma14:wrappingTextBoxFlag xmlns="" xmlns:ma14="http://schemas.microsoft.com/office/mac/drawingml/2011/main" val="0"/>
             </a:ext>
           </a:extLst>
         </p:spPr>
@@ -5333,7 +5359,7 @@
           </a:prstGeom>
           <a:extLst>
             <a:ext uri="{C572A759-6A51-4108-AA02-DFA0A04FC94B}">
-              <ma14:wrappingTextBoxFlag xmlns:ma14="http://schemas.microsoft.com/office/mac/drawingml/2011/main" xmlns="" val="0"/>
+              <ma14:wrappingTextBoxFlag xmlns="" xmlns:ma14="http://schemas.microsoft.com/office/mac/drawingml/2011/main" val="0"/>
             </a:ext>
           </a:extLst>
         </p:spPr>
@@ -5855,7 +5881,7 @@
           </a:prstGeom>
           <a:extLst>
             <a:ext uri="{C572A759-6A51-4108-AA02-DFA0A04FC94B}">
-              <ma14:wrappingTextBoxFlag xmlns:ma14="http://schemas.microsoft.com/office/mac/drawingml/2011/main" xmlns="" val="0"/>
+              <ma14:wrappingTextBoxFlag xmlns="" xmlns:ma14="http://schemas.microsoft.com/office/mac/drawingml/2011/main" val="0"/>
             </a:ext>
           </a:extLst>
         </p:spPr>
@@ -6812,7 +6838,7 @@
           </a:prstGeom>
           <a:extLst>
             <a:ext uri="{C572A759-6A51-4108-AA02-DFA0A04FC94B}">
-              <ma14:wrappingTextBoxFlag xmlns:ma14="http://schemas.microsoft.com/office/mac/drawingml/2011/main" xmlns="" val="0"/>
+              <ma14:wrappingTextBoxFlag xmlns="" xmlns:ma14="http://schemas.microsoft.com/office/mac/drawingml/2011/main" val="0"/>
             </a:ext>
           </a:extLst>
         </p:spPr>
@@ -8534,7 +8560,7 @@
           </a:prstGeom>
           <a:extLst>
             <a:ext uri="{C572A759-6A51-4108-AA02-DFA0A04FC94B}">
-              <ma14:wrappingTextBoxFlag xmlns:ma14="http://schemas.microsoft.com/office/mac/drawingml/2011/main" xmlns="" val="0"/>
+              <ma14:wrappingTextBoxFlag xmlns="" xmlns:ma14="http://schemas.microsoft.com/office/mac/drawingml/2011/main" val="0"/>
             </a:ext>
           </a:extLst>
         </p:spPr>
@@ -9506,7 +9532,7 @@
           </a:prstGeom>
           <a:extLst>
             <a:ext uri="{C572A759-6A51-4108-AA02-DFA0A04FC94B}">
-              <ma14:wrappingTextBoxFlag xmlns:ma14="http://schemas.microsoft.com/office/mac/drawingml/2011/main" xmlns="" val="0"/>
+              <ma14:wrappingTextBoxFlag xmlns="" xmlns:ma14="http://schemas.microsoft.com/office/mac/drawingml/2011/main" val="0"/>
             </a:ext>
           </a:extLst>
         </p:spPr>
@@ -10941,7 +10967,7 @@
           </a:prstGeom>
           <a:extLst>
             <a:ext uri="{C572A759-6A51-4108-AA02-DFA0A04FC94B}">
-              <ma14:wrappingTextBoxFlag xmlns:ma14="http://schemas.microsoft.com/office/mac/drawingml/2011/main" xmlns="" val="0"/>
+              <ma14:wrappingTextBoxFlag xmlns="" xmlns:ma14="http://schemas.microsoft.com/office/mac/drawingml/2011/main" val="0"/>
             </a:ext>
           </a:extLst>
         </p:spPr>
@@ -11199,7 +11225,7 @@
           </a:prstGeom>
           <a:extLst>
             <a:ext uri="{C572A759-6A51-4108-AA02-DFA0A04FC94B}">
-              <ma14:wrappingTextBoxFlag xmlns:ma14="http://schemas.microsoft.com/office/mac/drawingml/2011/main" xmlns="" val="0"/>
+              <ma14:wrappingTextBoxFlag xmlns="" xmlns:ma14="http://schemas.microsoft.com/office/mac/drawingml/2011/main" val="0"/>
             </a:ext>
           </a:extLst>
         </p:spPr>
